--- a/docs/webinar/E2E-2/E2E-2-diapositivas.pptx
+++ b/docs/webinar/E2E-2/E2E-2-diapositivas.pptx
@@ -147,12 +147,12 @@
   <p:extLst>
     <p:ext uri="{521415D9-36F7-43E2-AB2F-B90AF26B5E84}">
       <p14:sectionLst xmlns:p14="http://schemas.microsoft.com/office/powerpoint/2010/main">
-        <p14:section name="Portada" id="{3a4cb566-a597-39c1-4b1f-b1ae8030a9af}">
+        <p14:section name="Portada" id="{4982091b-00e8-7e96-cedd-4594f3066e7c}">
           <p14:sldIdLst>
             <p14:sldId id="256"/>
           </p14:sldIdLst>
         </p14:section>
-        <p14:section name="Clase 1 · Del alcance a la línea base" id="{bab9ff8e-61d8-85fd-5511-8bc8bdc2c065}">
+        <p14:section name="Clase 1 · Del alcance a la línea base" id="{43e71af7-8560-8c69-5cc0-fb162d12e408}">
           <p14:sldIdLst>
             <p14:sldId id="257"/>
             <p14:sldId id="258"/>
@@ -173,7 +173,7 @@
             <p14:sldId id="273"/>
           </p14:sldIdLst>
         </p14:section>
-        <p14:section name="Clase 2 · El cambio bajo control" id="{fb162230-8137-92e3-9e2e-7d6b7a53b314}">
+        <p14:section name="Clase 2 · El cambio bajo control" id="{22dab104-3f2c-de42-c098-f11f95a26e11}">
           <p14:sldIdLst>
             <p14:sldId id="274"/>
             <p14:sldId id="275"/>
@@ -197,7 +197,7 @@
             <p14:sldId id="293"/>
           </p14:sldIdLst>
         </p14:section>
-        <p14:section name="Glosario" id="{91e779c7-b102-08b9-8bf8-5ca0d79852ee}">
+        <p14:section name="Glosario" id="{5bcc28e7-b4da-d61e-ca59-65cee1fd9235}">
           <p14:sldIdLst>
             <p14:sldId id="294"/>
             <p14:sldId id="295"/>
@@ -3248,7 +3248,7 @@
           <a:p>
             <a:r>
               <a:rPr lang="en-US" dirty="0"/>
-              <a:t>Si el camino que correspondía no coincide con quien aprobó, encontraron un caso de autoridad excedida: es el hallazgo más valioso del ejercicio. La solución de referencia está en ejercicio.md.</a:t>
+              <a:t>Si el camino que correspondía no coincide con quien aprobó, encontraron un caso de autoridad excedida: es el hallazgo más valioso del ejercicio. El ejemplo resuelto, plegado al final de ejercicio.md, se muestra al terminar.</a:t>
             </a:r>
             <a:endParaRPr lang="en-US" dirty="0"/>
           </a:p>

--- a/docs/webinar/E2E-2/E2E-2-diapositivas.pptx
+++ b/docs/webinar/E2E-2/E2E-2-diapositivas.pptx
@@ -149,12 +149,12 @@
   <p:extLst>
     <p:ext uri="{521415D9-36F7-43E2-AB2F-B90AF26B5E84}">
       <p14:sectionLst xmlns:p14="http://schemas.microsoft.com/office/powerpoint/2010/main">
-        <p14:section name="Portada" id="{25a6a56e-3436-f6d0-8eb6-63c0a2c6acb5}">
+        <p14:section name="Portada" id="{90bf81a1-d705-d2ed-5b52-4a26d00b061a}">
           <p14:sldIdLst>
             <p14:sldId id="256"/>
           </p14:sldIdLst>
         </p14:section>
-        <p14:section name="Clase 1 · Del alcance a la línea base" id="{ab124620-d3b8-2adb-b8ec-2b42f1e39ac8}">
+        <p14:section name="Clase 1 · Del alcance a la línea base" id="{0c450b84-dec9-99ce-cbff-596125215410}">
           <p14:sldIdLst>
             <p14:sldId id="257"/>
             <p14:sldId id="258"/>
@@ -176,7 +176,7 @@
             <p14:sldId id="274"/>
           </p14:sldIdLst>
         </p14:section>
-        <p14:section name="Clase 2 · El cambio bajo control" id="{0fe84dd2-76e0-7955-d810-f2eea884ba67}">
+        <p14:section name="Clase 2 · El cambio bajo control" id="{06107275-ebff-6380-48fe-cc5dd3f31576}">
           <p14:sldIdLst>
             <p14:sldId id="275"/>
             <p14:sldId id="276"/>
@@ -201,7 +201,7 @@
             <p14:sldId id="295"/>
           </p14:sldIdLst>
         </p14:section>
-        <p14:section name="Glosario" id="{19a6e2ac-d84e-5008-d72e-9268967e0687}">
+        <p14:section name="Glosario" id="{5d2dcf34-7d31-02e3-ad00-f429895ff61d}">
           <p14:sldIdLst>
             <p14:sldId id="296"/>
             <p14:sldId id="297"/>
@@ -4539,7 +4539,7 @@
                   <a:srgbClr val="D6E4F0"/>
                 </a:solidFill>
               </a:rPr>
-              <a:t>pm-method 2.4.0 · Webinar E2E-2 · Clase 1</a:t>
+              <a:t>pm-method 2.5.0 · Webinar E2E-2 · Clase 1</a:t>
             </a:r>
             <a:endParaRPr lang="en-US" sz="1000" dirty="0"/>
           </a:p>
@@ -4779,7 +4779,7 @@
                   <a:srgbClr val="696969"/>
                 </a:solidFill>
               </a:rPr>
-              <a:t>pm-method 2.4.0 · Webinar E2E-2 · Clase 2</a:t>
+              <a:t>pm-method 2.5.0 · Webinar E2E-2 · Clase 2</a:t>
             </a:r>
             <a:endParaRPr lang="en-US" sz="1000" dirty="0"/>
           </a:p>
@@ -4997,7 +4997,7 @@
                   <a:srgbClr val="D6E4F0"/>
                 </a:solidFill>
               </a:rPr>
-              <a:t>pm-method 2.4.0 · Webinar E2E-2 · Clase 2</a:t>
+              <a:t>pm-method 2.5.0 · Webinar E2E-2 · Clase 2</a:t>
             </a:r>
             <a:endParaRPr lang="en-US" sz="1000" dirty="0"/>
           </a:p>
@@ -5215,7 +5215,7 @@
                   <a:srgbClr val="D6E4F0"/>
                 </a:solidFill>
               </a:rPr>
-              <a:t>pm-method 2.4.0 · Webinar E2E-2 · Clase 2</a:t>
+              <a:t>pm-method 2.5.0 · Webinar E2E-2 · Clase 2</a:t>
             </a:r>
             <a:endParaRPr lang="en-US" sz="1000" dirty="0"/>
           </a:p>
@@ -5433,7 +5433,7 @@
                   <a:srgbClr val="D6E4F0"/>
                 </a:solidFill>
               </a:rPr>
-              <a:t>pm-method 2.4.0 · Webinar E2E-2 · Clase 2</a:t>
+              <a:t>pm-method 2.5.0 · Webinar E2E-2 · Clase 2</a:t>
             </a:r>
             <a:endParaRPr lang="en-US" sz="1000" dirty="0"/>
           </a:p>
@@ -5609,7 +5609,7 @@
                   <a:srgbClr val="D6E4F0"/>
                 </a:solidFill>
               </a:rPr>
-              <a:t>pm-method 2.4.0 · Webinar E2E-2</a:t>
+              <a:t>pm-method 2.5.0 · Webinar E2E-2</a:t>
             </a:r>
             <a:endParaRPr lang="en-US" sz="1000" dirty="0"/>
           </a:p>
@@ -5804,7 +5804,7 @@
                   <a:srgbClr val="696969"/>
                 </a:solidFill>
               </a:rPr>
-              <a:t>pm-method 2.4.0 · Webinar E2E-2</a:t>
+              <a:t>pm-method 2.5.0 · Webinar E2E-2</a:t>
             </a:r>
             <a:endParaRPr lang="en-US" sz="1000" dirty="0"/>
           </a:p>
@@ -6022,7 +6022,7 @@
                   <a:srgbClr val="D6E4F0"/>
                 </a:solidFill>
               </a:rPr>
-              <a:t>pm-method 2.4.0 · Webinar E2E-2</a:t>
+              <a:t>pm-method 2.5.0 · Webinar E2E-2</a:t>
             </a:r>
             <a:endParaRPr lang="en-US" sz="1000" dirty="0"/>
           </a:p>
@@ -6240,7 +6240,7 @@
                   <a:srgbClr val="D6E4F0"/>
                 </a:solidFill>
               </a:rPr>
-              <a:t>pm-method 2.4.0 · Webinar E2E-2</a:t>
+              <a:t>pm-method 2.5.0 · Webinar E2E-2</a:t>
             </a:r>
             <a:endParaRPr lang="en-US" sz="1000" dirty="0"/>
           </a:p>
@@ -6458,7 +6458,7 @@
                   <a:srgbClr val="D6E4F0"/>
                 </a:solidFill>
               </a:rPr>
-              <a:t>pm-method 2.4.0 · Webinar E2E-2</a:t>
+              <a:t>pm-method 2.5.0 · Webinar E2E-2</a:t>
             </a:r>
             <a:endParaRPr lang="en-US" sz="1000" dirty="0"/>
           </a:p>
@@ -6698,7 +6698,7 @@
                   <a:srgbClr val="696969"/>
                 </a:solidFill>
               </a:rPr>
-              <a:t>pm-method 2.4.0 · Webinar E2E-2 · Clase 1</a:t>
+              <a:t>pm-method 2.5.0 · Webinar E2E-2 · Clase 1</a:t>
             </a:r>
             <a:endParaRPr lang="en-US" sz="1000" dirty="0"/>
           </a:p>
@@ -6916,7 +6916,7 @@
                   <a:srgbClr val="D6E4F0"/>
                 </a:solidFill>
               </a:rPr>
-              <a:t>pm-method 2.4.0 · Webinar E2E-2 · Clase 1</a:t>
+              <a:t>pm-method 2.5.0 · Webinar E2E-2 · Clase 1</a:t>
             </a:r>
             <a:endParaRPr lang="en-US" sz="1000" dirty="0"/>
           </a:p>
@@ -7134,7 +7134,7 @@
                   <a:srgbClr val="D6E4F0"/>
                 </a:solidFill>
               </a:rPr>
-              <a:t>pm-method 2.4.0 · Webinar E2E-2 · Clase 1</a:t>
+              <a:t>pm-method 2.5.0 · Webinar E2E-2 · Clase 1</a:t>
             </a:r>
             <a:endParaRPr lang="en-US" sz="1000" dirty="0"/>
           </a:p>
@@ -7578,7 +7578,7 @@
                 <a:ea typeface="Arial" pitchFamily="34" charset="-122"/>
                 <a:cs typeface="Arial" pitchFamily="34" charset="-120"/>
               </a:rPr>
-              <a:t>Webinar · pm-method 2.4.0 · E2E-2</a:t>
+              <a:t>Webinar · pm-method 2.5.0 · E2E-2</a:t>
             </a:r>
             <a:endParaRPr lang="en-US" sz="1600" dirty="0"/>
           </a:p>

--- a/docs/webinar/E2E-2/E2E-2-diapositivas.pptx
+++ b/docs/webinar/E2E-2/E2E-2-diapositivas.pptx
@@ -151,12 +151,12 @@
   <p:extLst>
     <p:ext uri="{521415D9-36F7-43E2-AB2F-B90AF26B5E84}">
       <p14:sectionLst xmlns:p14="http://schemas.microsoft.com/office/powerpoint/2010/main">
-        <p14:section name="Portada" id="{e7c432a9-2bb1-5c6f-17e0-a3da8618adec}">
+        <p14:section name="Portada" id="{5fde07bd-58ff-994b-1843-f2a66a036541}">
           <p14:sldIdLst>
             <p14:sldId id="256"/>
           </p14:sldIdLst>
         </p14:section>
-        <p14:section name="Clase 1 · Del alcance a la línea base" id="{4738faa0-d58f-0625-76f5-06a7236e733d}">
+        <p14:section name="Clase 1 · Del alcance a la línea base" id="{65e4a4ff-d458-da1e-7825-ff6c3c50c532}">
           <p14:sldIdLst>
             <p14:sldId id="257"/>
             <p14:sldId id="258"/>
@@ -180,7 +180,7 @@
             <p14:sldId id="276"/>
           </p14:sldIdLst>
         </p14:section>
-        <p14:section name="Clase 2 · El cambio bajo control" id="{caa6dc0f-95db-3ef5-1906-f17f33ca3415}">
+        <p14:section name="Clase 2 · El cambio bajo control" id="{349e0cf9-92af-e8c4-0362-eaea46393b88}">
           <p14:sldIdLst>
             <p14:sldId id="277"/>
             <p14:sldId id="278"/>
@@ -205,7 +205,7 @@
             <p14:sldId id="297"/>
           </p14:sldIdLst>
         </p14:section>
-        <p14:section name="Glosario" id="{e2ea8335-b1c5-399c-b2ff-2f14b7f6e01c}">
+        <p14:section name="Glosario" id="{3e120df9-70b0-a7ac-b359-8c13c3d6d48e}">
           <p14:sldIdLst>
             <p14:sldId id="298"/>
             <p14:sldId id="299"/>
@@ -4719,7 +4719,7 @@
                   <a:srgbClr val="D6E4F0"/>
                 </a:solidFill>
               </a:rPr>
-              <a:t>pm-method 2.6.0 · Webinar E2E-2 · Clase 1</a:t>
+              <a:t>pm-method 2.7.0 · Webinar E2E-2 · Clase 1</a:t>
             </a:r>
             <a:endParaRPr lang="en-US" sz="1000" dirty="0"/>
           </a:p>
@@ -4959,7 +4959,7 @@
                   <a:srgbClr val="696969"/>
                 </a:solidFill>
               </a:rPr>
-              <a:t>pm-method 2.6.0 · Webinar E2E-2 · Clase 2</a:t>
+              <a:t>pm-method 2.7.0 · Webinar E2E-2 · Clase 2</a:t>
             </a:r>
             <a:endParaRPr lang="en-US" sz="1000" dirty="0"/>
           </a:p>
@@ -5177,7 +5177,7 @@
                   <a:srgbClr val="D6E4F0"/>
                 </a:solidFill>
               </a:rPr>
-              <a:t>pm-method 2.6.0 · Webinar E2E-2 · Clase 2</a:t>
+              <a:t>pm-method 2.7.0 · Webinar E2E-2 · Clase 2</a:t>
             </a:r>
             <a:endParaRPr lang="en-US" sz="1000" dirty="0"/>
           </a:p>
@@ -5395,7 +5395,7 @@
                   <a:srgbClr val="D6E4F0"/>
                 </a:solidFill>
               </a:rPr>
-              <a:t>pm-method 2.6.0 · Webinar E2E-2 · Clase 2</a:t>
+              <a:t>pm-method 2.7.0 · Webinar E2E-2 · Clase 2</a:t>
             </a:r>
             <a:endParaRPr lang="en-US" sz="1000" dirty="0"/>
           </a:p>
@@ -5613,7 +5613,7 @@
                   <a:srgbClr val="D6E4F0"/>
                 </a:solidFill>
               </a:rPr>
-              <a:t>pm-method 2.6.0 · Webinar E2E-2 · Clase 2</a:t>
+              <a:t>pm-method 2.7.0 · Webinar E2E-2 · Clase 2</a:t>
             </a:r>
             <a:endParaRPr lang="en-US" sz="1000" dirty="0"/>
           </a:p>
@@ -5789,7 +5789,7 @@
                   <a:srgbClr val="D6E4F0"/>
                 </a:solidFill>
               </a:rPr>
-              <a:t>pm-method 2.6.0 · Webinar E2E-2</a:t>
+              <a:t>pm-method 2.7.0 · Webinar E2E-2</a:t>
             </a:r>
             <a:endParaRPr lang="en-US" sz="1000" dirty="0"/>
           </a:p>
@@ -5984,7 +5984,7 @@
                   <a:srgbClr val="696969"/>
                 </a:solidFill>
               </a:rPr>
-              <a:t>pm-method 2.6.0 · Webinar E2E-2</a:t>
+              <a:t>pm-method 2.7.0 · Webinar E2E-2</a:t>
             </a:r>
             <a:endParaRPr lang="en-US" sz="1000" dirty="0"/>
           </a:p>
@@ -6202,7 +6202,7 @@
                   <a:srgbClr val="D6E4F0"/>
                 </a:solidFill>
               </a:rPr>
-              <a:t>pm-method 2.6.0 · Webinar E2E-2</a:t>
+              <a:t>pm-method 2.7.0 · Webinar E2E-2</a:t>
             </a:r>
             <a:endParaRPr lang="en-US" sz="1000" dirty="0"/>
           </a:p>
@@ -6420,7 +6420,7 @@
                   <a:srgbClr val="D6E4F0"/>
                 </a:solidFill>
               </a:rPr>
-              <a:t>pm-method 2.6.0 · Webinar E2E-2</a:t>
+              <a:t>pm-method 2.7.0 · Webinar E2E-2</a:t>
             </a:r>
             <a:endParaRPr lang="en-US" sz="1000" dirty="0"/>
           </a:p>
@@ -6638,7 +6638,7 @@
                   <a:srgbClr val="D6E4F0"/>
                 </a:solidFill>
               </a:rPr>
-              <a:t>pm-method 2.6.0 · Webinar E2E-2</a:t>
+              <a:t>pm-method 2.7.0 · Webinar E2E-2</a:t>
             </a:r>
             <a:endParaRPr lang="en-US" sz="1000" dirty="0"/>
           </a:p>
@@ -6878,7 +6878,7 @@
                   <a:srgbClr val="696969"/>
                 </a:solidFill>
               </a:rPr>
-              <a:t>pm-method 2.6.0 · Webinar E2E-2 · Clase 1</a:t>
+              <a:t>pm-method 2.7.0 · Webinar E2E-2 · Clase 1</a:t>
             </a:r>
             <a:endParaRPr lang="en-US" sz="1000" dirty="0"/>
           </a:p>
@@ -7096,7 +7096,7 @@
                   <a:srgbClr val="D6E4F0"/>
                 </a:solidFill>
               </a:rPr>
-              <a:t>pm-method 2.6.0 · Webinar E2E-2 · Clase 1</a:t>
+              <a:t>pm-method 2.7.0 · Webinar E2E-2 · Clase 1</a:t>
             </a:r>
             <a:endParaRPr lang="en-US" sz="1000" dirty="0"/>
           </a:p>
@@ -7314,7 +7314,7 @@
                   <a:srgbClr val="D6E4F0"/>
                 </a:solidFill>
               </a:rPr>
-              <a:t>pm-method 2.6.0 · Webinar E2E-2 · Clase 1</a:t>
+              <a:t>pm-method 2.7.0 · Webinar E2E-2 · Clase 1</a:t>
             </a:r>
             <a:endParaRPr lang="en-US" sz="1000" dirty="0"/>
           </a:p>
@@ -7758,7 +7758,7 @@
                 <a:ea typeface="Arial" pitchFamily="34" charset="-122"/>
                 <a:cs typeface="Arial" pitchFamily="34" charset="-120"/>
               </a:rPr>
-              <a:t>Webinar · pm-method 2.6.0 · E2E-2</a:t>
+              <a:t>Webinar · pm-method 2.7.0 · E2E-2</a:t>
             </a:r>
             <a:endParaRPr lang="en-US" sz="1600" dirty="0"/>
           </a:p>
